--- a/방학 과제.pptx
+++ b/방학 과제.pptx
@@ -2,7 +2,7 @@
 <file path=ppt/presentation.xml><?xml version="1.0" encoding="utf-8"?>
 <p:presentation xmlns:r="http://schemas.openxmlformats.org/officeDocument/2006/relationships" xmlns:c="http://schemas.openxmlformats.org/drawingml/2006/chart" xmlns:a="http://schemas.openxmlformats.org/drawingml/2006/main" xmlns:dgm="http://schemas.openxmlformats.org/drawingml/2006/diagram" xmlns:dsp="http://schemas.microsoft.com/office/drawing/2008/diagram" xmlns:p="http://schemas.openxmlformats.org/presentationml/2006/main">
   <p:sldMasterIdLst>
-    <p:sldMasterId id="2147483676" r:id="rId1"/>
+    <p:sldMasterId id="2147483671" r:id="rId1"/>
   </p:sldMasterIdLst>
   <p:sldIdLst>
     <p:sldId id="256" r:id="rId2"/>
@@ -16,10 +16,9 @@
     <p:sldId id="265" r:id="rId10"/>
     <p:sldId id="266" r:id="rId11"/>
     <p:sldId id="267" r:id="rId12"/>
-    <p:sldId id="268" r:id="rId13"/>
-    <p:sldId id="269" r:id="rId14"/>
-    <p:sldId id="271" r:id="rId15"/>
-    <p:sldId id="272" r:id="rId16"/>
+    <p:sldId id="269" r:id="rId13"/>
+    <p:sldId id="271" r:id="rId14"/>
+    <p:sldId id="272" r:id="rId15"/>
   </p:sldIdLst>
   <p:sldSz cx="12192000" cy="6858000"/>
   <p:notesSz cx="6858000" cy="9144000"/>
@@ -3839,17 +3838,24 @@
       </p:sp>
       <p:sp>
         <p:nvSpPr>
-          <p:cNvPr id="3" name="내용 개체 틀 2"/>
-          <p:cNvSpPr>
-            <a:spLocks noGrp="1"/>
-          </p:cNvSpPr>
-          <p:nvPr>
-            <p:ph idx="1"/>
-          </p:nvPr>
-        </p:nvSpPr>
-        <p:spPr/>
-        <p:txBody>
-          <a:bodyPr/>
+          <p:cNvPr id="7" name="TextBox 6"/>
+          <p:cNvSpPr txBox="1"/>
+          <p:nvPr/>
+        </p:nvSpPr>
+        <p:spPr>
+          <a:xfrm>
+            <a:off x="6757106" y="1971830"/>
+            <a:ext cx="5307259" cy="3331690"/>
+          </a:xfrm>
+          <a:prstGeom prst="rect">
+            <a:avLst/>
+          </a:prstGeom>
+          <a:noFill/>
+        </p:spPr>
+        <p:txBody>
+          <a:bodyPr wrap="none">
+            <a:spAutoFit/>
+          </a:bodyPr>
           <a:lstStyle/>
           <a:p>
             <a:pPr lvl="0">
@@ -3857,26 +3863,59 @@
             </a:pPr>
             <a:r>
               <a:rPr lang="ko-KR" altLang="en-US"/>
-              <a:t>기본원리</a:t>
-            </a:r>
-            <a:r>
-              <a:rPr lang="en-US" altLang="ko-KR"/>
-              <a:t>: </a:t>
-            </a:r>
-            <a:r>
-              <a:rPr lang="ko-KR" altLang="en-US"/>
-              <a:t>시스템이 가질 수 있는 상태를 정의하고 현재 상태와 입력에 따라 다음 상태로 전이하면서 동작하는 순차논리 모델</a:t>
+              <a:t>조합 논리가 다음 상태를 계산 </a:t>
             </a:r>
             <a:endParaRPr lang="ko-KR" altLang="en-US"/>
           </a:p>
           <a:p>
-            <a:pPr marL="0" indent="0">
-              <a:buNone/>
+            <a:pPr lvl="0">
               <a:defRPr/>
             </a:pPr>
+            <a:endParaRPr lang="ko-KR" altLang="en-US"/>
+          </a:p>
+          <a:p>
+            <a:pPr lvl="0">
+              <a:defRPr/>
+            </a:pPr>
+            <a:r>
+              <a:rPr lang="en-US" altLang="ko-KR"/>
+              <a:t>Clock</a:t>
+            </a:r>
+            <a:r>
+              <a:rPr lang="ko-KR" altLang="en-US"/>
+              <a:t> 상승 일때 </a:t>
+            </a:r>
+            <a:r>
+              <a:rPr lang="en-US" altLang="ko-KR"/>
+              <a:t>state </a:t>
+            </a:r>
+            <a:r>
+              <a:rPr lang="ko-KR" altLang="en-US"/>
+              <a:t>저장 </a:t>
+            </a:r>
+            <a:endParaRPr lang="ko-KR" altLang="en-US"/>
+          </a:p>
+          <a:p>
+            <a:pPr lvl="0">
+              <a:defRPr/>
+            </a:pPr>
+            <a:endParaRPr lang="ko-KR" altLang="en-US"/>
+          </a:p>
+          <a:p>
+            <a:pPr lvl="0">
+              <a:defRPr/>
+            </a:pPr>
             <a:r>
               <a:rPr lang="ko-KR" altLang="en-US"/>
               <a:t>즉</a:t>
+            </a:r>
+            <a:r>
+              <a:rPr lang="en-US" altLang="ko-KR"/>
+              <a:t>, </a:t>
+            </a:r>
+            <a:r>
+              <a:rPr lang="ko-KR" altLang="en-US"/>
+              <a:t>조합</a:t>
             </a:r>
             <a:r>
               <a:rPr lang="en-US" altLang="ko-KR"/>
@@ -3884,13 +3923,97 @@
             </a:r>
             <a:r>
               <a:rPr lang="ko-KR" altLang="en-US"/>
+              <a:t>순차 논리가 동시에 들어감</a:t>
+            </a:r>
+            <a:endParaRPr lang="ko-KR" altLang="en-US"/>
+          </a:p>
+          <a:p>
+            <a:pPr lvl="0">
+              <a:defRPr/>
+            </a:pPr>
+            <a:endParaRPr lang="ko-KR" altLang="en-US"/>
+          </a:p>
+          <a:p>
+            <a:pPr lvl="0">
+              <a:defRPr/>
+            </a:pPr>
+            <a:r>
+              <a:rPr lang="en-US" altLang="ko-KR" b="1"/>
+              <a:t>FSM</a:t>
+            </a:r>
+            <a:r>
+              <a:rPr lang="ko-KR" altLang="en-US" b="1"/>
+              <a:t> 종류</a:t>
+            </a:r>
+            <a:endParaRPr lang="ko-KR" altLang="en-US" b="1"/>
+          </a:p>
+          <a:p>
+            <a:pPr lvl="0">
+              <a:defRPr/>
+            </a:pPr>
+            <a:endParaRPr lang="en-US" altLang="ko-KR" b="1"/>
+          </a:p>
+          <a:p>
+            <a:pPr lvl="0">
+              <a:defRPr/>
+            </a:pPr>
+            <a:r>
+              <a:rPr lang="en-US" altLang="ko-KR" sz="1700" b="1"/>
+              <a:t>1. Moore</a:t>
+            </a:r>
+            <a:r>
+              <a:rPr lang="ko-KR" altLang="en-US" sz="1700" b="1"/>
               <a:t> </a:t>
             </a:r>
             <a:r>
-              <a:rPr lang="ko-KR" altLang="ko-KR"/>
-              <a:t>지금 어떤 상태이고, 어떤 입력이 들어왔는지를 보고 다음에 어디로 갈지 결정하는 회로</a:t>
-            </a:r>
-            <a:endParaRPr lang="ko-KR" altLang="ko-KR"/>
+              <a:rPr lang="en-US" altLang="ko-KR" sz="1700" b="1"/>
+              <a:t>FSM: </a:t>
+            </a:r>
+            <a:r>
+              <a:rPr lang="ko-KR" altLang="en-US" sz="1700" b="0"/>
+              <a:t>출력 </a:t>
+            </a:r>
+            <a:r>
+              <a:rPr lang="en-US" altLang="ko-KR" sz="1700" b="0"/>
+              <a:t>=</a:t>
+            </a:r>
+            <a:r>
+              <a:rPr lang="ko-KR" altLang="en-US" sz="1700" b="0"/>
+              <a:t> 현재상태에 의해서만 결정</a:t>
+            </a:r>
+            <a:endParaRPr lang="ko-KR" altLang="en-US" sz="1700" b="0"/>
+          </a:p>
+          <a:p>
+            <a:pPr lvl="0">
+              <a:defRPr/>
+            </a:pPr>
+            <a:r>
+              <a:rPr lang="en-US" altLang="ko-KR" sz="1700" b="1"/>
+              <a:t>2. Mealy FSM:</a:t>
+            </a:r>
+            <a:r>
+              <a:rPr lang="ko-KR" altLang="en-US" sz="1700" b="1"/>
+              <a:t> </a:t>
+            </a:r>
+            <a:r>
+              <a:rPr lang="ko-KR" altLang="en-US" sz="1700" b="0"/>
+              <a:t>출력 </a:t>
+            </a:r>
+            <a:r>
+              <a:rPr lang="en-US" altLang="ko-KR" sz="1700" b="0"/>
+              <a:t>=</a:t>
+            </a:r>
+            <a:r>
+              <a:rPr lang="ko-KR" altLang="en-US" sz="1700" b="0"/>
+              <a:t> 현재상태와 입력에 의해 결정</a:t>
+            </a:r>
+            <a:endParaRPr lang="ko-KR" altLang="en-US" sz="1700" b="0"/>
+          </a:p>
+          <a:p>
+            <a:pPr lvl="0">
+              <a:defRPr/>
+            </a:pPr>
+            <a:endParaRPr lang="ko-KR" altLang="en-US" sz="1700"/>
           </a:p>
           <a:p>
             <a:pPr lvl="0">
@@ -3898,19 +4021,34 @@
             </a:pPr>
             <a:endParaRPr lang="en-US" altLang="ko-KR"/>
           </a:p>
-          <a:p>
-            <a:pPr marL="0" indent="0">
-              <a:buNone/>
-              <a:defRPr/>
-            </a:pPr>
-            <a:r>
-              <a:rPr lang="en-US" altLang="ko-KR"/>
-              <a:t>Next State = f(Present State, Input)</a:t>
-            </a:r>
-            <a:endParaRPr lang="ko-KR" altLang="en-US"/>
-          </a:p>
-        </p:txBody>
-      </p:sp>
+        </p:txBody>
+      </p:sp>
+      <p:pic>
+        <p:nvPicPr>
+          <p:cNvPr id="8" name=""/>
+          <p:cNvPicPr>
+            <a:picLocks noGrp="1" noChangeAspect="1"/>
+          </p:cNvPicPr>
+          <p:nvPr>
+            <p:ph idx="1"/>
+          </p:nvPr>
+        </p:nvPicPr>
+        <p:blipFill rotWithShape="1">
+          <a:blip r:embed="rId2"/>
+          <a:stretch>
+            <a:fillRect/>
+          </a:stretch>
+        </p:blipFill>
+        <p:spPr>
+          <a:xfrm>
+            <a:off x="184533" y="1780976"/>
+            <a:ext cx="6539535" cy="4351338"/>
+          </a:xfrm>
+          <a:prstGeom prst="rect">
+            <a:avLst/>
+          </a:prstGeom>
+        </p:spPr>
+      </p:pic>
     </p:spTree>
   </p:cSld>
   <p:clrMapOvr>
@@ -3928,172 +4066,6 @@
 </file>
 
 <file path=ppt/slides/slide13.xml><?xml version="1.0" encoding="utf-8"?>
-<p:sld xmlns:r="http://schemas.openxmlformats.org/officeDocument/2006/relationships" xmlns:c="http://schemas.openxmlformats.org/drawingml/2006/chart" xmlns:a="http://schemas.openxmlformats.org/drawingml/2006/main" xmlns:dgm="http://schemas.openxmlformats.org/drawingml/2006/diagram" xmlns:dsp="http://schemas.microsoft.com/office/drawing/2008/diagram" xmlns:p="http://schemas.openxmlformats.org/presentationml/2006/main">
-  <p:cSld>
-    <p:spTree>
-      <p:nvGrpSpPr>
-        <p:cNvPr id="1" name=""/>
-        <p:cNvGrpSpPr/>
-        <p:nvPr/>
-      </p:nvGrpSpPr>
-      <p:grpSpPr>
-        <a:xfrm>
-          <a:off x="0" y="0"/>
-          <a:ext cx="0" cy="0"/>
-          <a:chOff x="0" y="0"/>
-          <a:chExt cx="0" cy="0"/>
-        </a:xfrm>
-      </p:grpSpPr>
-      <p:sp>
-        <p:nvSpPr>
-          <p:cNvPr id="2" name="제목 1"/>
-          <p:cNvSpPr>
-            <a:spLocks noGrp="1"/>
-          </p:cNvSpPr>
-          <p:nvPr>
-            <p:ph type="title" idx="0"/>
-          </p:nvPr>
-        </p:nvSpPr>
-        <p:spPr/>
-        <p:txBody>
-          <a:bodyPr/>
-          <a:lstStyle/>
-          <a:p>
-            <a:pPr algn="ctr">
-              <a:defRPr/>
-            </a:pPr>
-            <a:r>
-              <a:rPr lang="en-US" altLang="ko-KR"/>
-              <a:t>FSM</a:t>
-            </a:r>
-            <a:endParaRPr lang="ko-KR" altLang="en-US"/>
-          </a:p>
-        </p:txBody>
-      </p:sp>
-      <p:pic>
-        <p:nvPicPr>
-          <p:cNvPr id="5" name="내용 개체 틀 4"/>
-          <p:cNvPicPr>
-            <a:picLocks noGrp="1" noChangeAspect="1"/>
-          </p:cNvPicPr>
-          <p:nvPr>
-            <p:ph idx="1"/>
-          </p:nvPr>
-        </p:nvPicPr>
-        <p:blipFill rotWithShape="1">
-          <a:blip r:embed="rId2"/>
-          <a:stretch>
-            <a:fillRect/>
-          </a:stretch>
-        </p:blipFill>
-        <p:spPr>
-          <a:xfrm>
-            <a:off x="604435" y="1690688"/>
-            <a:ext cx="5331415" cy="4138048"/>
-          </a:xfrm>
-          <a:prstGeom prst="rect">
-            <a:avLst/>
-          </a:prstGeom>
-        </p:spPr>
-      </p:pic>
-      <p:sp>
-        <p:nvSpPr>
-          <p:cNvPr id="7" name="TextBox 6"/>
-          <p:cNvSpPr txBox="1"/>
-          <p:nvPr/>
-        </p:nvSpPr>
-        <p:spPr>
-          <a:xfrm>
-            <a:off x="6746033" y="1912776"/>
-            <a:ext cx="3927678" cy="923330"/>
-          </a:xfrm>
-          <a:prstGeom prst="rect">
-            <a:avLst/>
-          </a:prstGeom>
-          <a:noFill/>
-        </p:spPr>
-        <p:txBody>
-          <a:bodyPr wrap="none">
-            <a:spAutoFit/>
-          </a:bodyPr>
-          <a:lstStyle/>
-          <a:p>
-            <a:pPr lvl="0">
-              <a:defRPr/>
-            </a:pPr>
-            <a:r>
-              <a:rPr lang="ko-KR" altLang="en-US"/>
-              <a:t>조합 논리가 다음 상태를 계산 </a:t>
-            </a:r>
-            <a:endParaRPr lang="ko-KR" altLang="en-US"/>
-          </a:p>
-          <a:p>
-            <a:pPr lvl="0">
-              <a:defRPr/>
-            </a:pPr>
-            <a:r>
-              <a:rPr lang="en-US" altLang="ko-KR"/>
-              <a:t>Clock</a:t>
-            </a:r>
-            <a:r>
-              <a:rPr lang="ko-KR" altLang="en-US"/>
-              <a:t> 상승 일때 </a:t>
-            </a:r>
-            <a:r>
-              <a:rPr lang="en-US" altLang="ko-KR"/>
-              <a:t>state </a:t>
-            </a:r>
-            <a:r>
-              <a:rPr lang="ko-KR" altLang="en-US"/>
-              <a:t>저장 </a:t>
-            </a:r>
-            <a:endParaRPr lang="ko-KR" altLang="en-US"/>
-          </a:p>
-          <a:p>
-            <a:pPr lvl="0">
-              <a:defRPr/>
-            </a:pPr>
-            <a:r>
-              <a:rPr lang="ko-KR" altLang="en-US"/>
-              <a:t>즉</a:t>
-            </a:r>
-            <a:r>
-              <a:rPr lang="en-US" altLang="ko-KR"/>
-              <a:t>, </a:t>
-            </a:r>
-            <a:r>
-              <a:rPr lang="ko-KR" altLang="en-US"/>
-              <a:t>조합</a:t>
-            </a:r>
-            <a:r>
-              <a:rPr lang="en-US" altLang="ko-KR"/>
-              <a:t>,</a:t>
-            </a:r>
-            <a:r>
-              <a:rPr lang="ko-KR" altLang="en-US"/>
-              <a:t>순차 논리가 동시에 들어감 </a:t>
-            </a:r>
-            <a:endParaRPr lang="ko-KR" altLang="en-US"/>
-          </a:p>
-        </p:txBody>
-      </p:sp>
-    </p:spTree>
-  </p:cSld>
-  <p:clrMapOvr>
-    <a:masterClrMapping/>
-  </p:clrMapOvr>
-  <mc:AlternateContent xmlns:mc="http://schemas.openxmlformats.org/markup-compatibility/2006">
-    <mc:Choice xmlns:p14="http://schemas.microsoft.com/office/powerpoint/2010/main" Requires="p14">
-      <p:transition xmlns:mc="http://schemas.openxmlformats.org/markup-compatibility/2006" xmlns:p14="http://schemas.microsoft.com/office/powerpoint/2010/main" mc:Ignorable="p14" p14:dur="500"/>
-    </mc:Choice>
-    <mc:Fallback>
-      <p:transition/>
-    </mc:Fallback>
-  </mc:AlternateContent>
-</p:sld>
-</file>
-
-<file path=ppt/slides/slide14.xml><?xml version="1.0" encoding="utf-8"?>
 <p:sld xmlns:r="http://schemas.openxmlformats.org/officeDocument/2006/relationships" xmlns:c="http://schemas.openxmlformats.org/drawingml/2006/chart" xmlns:a="http://schemas.openxmlformats.org/drawingml/2006/main" xmlns:dgm="http://schemas.openxmlformats.org/drawingml/2006/diagram" xmlns:dsp="http://schemas.microsoft.com/office/drawing/2008/diagram" xmlns:p="http://schemas.openxmlformats.org/presentationml/2006/main">
   <p:cSld>
     <p:spTree>
@@ -4278,7 +4250,7 @@
             </a:pPr>
             <a:r>
               <a:rPr lang="en-US" altLang="ko-KR" sz="900" b="1"/>
-              <a:t>첫 번째</a:t>
+              <a:t>1.</a:t>
             </a:r>
             <a:r>
               <a:rPr lang="en-US" altLang="ko-KR" sz="900"/>
@@ -4316,7 +4288,7 @@
             </a:pPr>
             <a:r>
               <a:rPr lang="en-US" altLang="ko-KR" sz="900" b="1"/>
-              <a:t>두 번째</a:t>
+              <a:t>2.</a:t>
             </a:r>
             <a:r>
               <a:rPr lang="en-US" altLang="ko-KR" sz="900"/>
@@ -4330,7 +4302,7 @@
             </a:pPr>
             <a:r>
               <a:rPr lang="en-US" altLang="ko-KR" sz="900" b="1"/>
-              <a:t>마지막</a:t>
+              <a:t>3.</a:t>
             </a:r>
             <a:r>
               <a:rPr lang="en-US" altLang="ko-KR" sz="900"/>
@@ -4404,7 +4376,7 @@
 </p:sld>
 </file>
 
-<file path=ppt/slides/slide15.xml><?xml version="1.0" encoding="utf-8"?>
+<file path=ppt/slides/slide14.xml><?xml version="1.0" encoding="utf-8"?>
 <p:sld xmlns:r="http://schemas.openxmlformats.org/officeDocument/2006/relationships" xmlns:c="http://schemas.openxmlformats.org/drawingml/2006/chart" xmlns:a="http://schemas.openxmlformats.org/drawingml/2006/main" xmlns:dgm="http://schemas.openxmlformats.org/drawingml/2006/diagram" xmlns:dsp="http://schemas.microsoft.com/office/drawing/2008/diagram" xmlns:p="http://schemas.openxmlformats.org/presentationml/2006/main">
   <p:cSld>
     <p:spTree>
@@ -4975,7 +4947,7 @@
 </file>
 
 <file path=ppt/slides/slide4.xml><?xml version="1.0" encoding="utf-8"?>
-<p:sld xmlns:a="http://schemas.openxmlformats.org/drawingml/2006/main" xmlns:r="http://schemas.openxmlformats.org/officeDocument/2006/relationships" xmlns:p="http://schemas.openxmlformats.org/presentationml/2006/main">
+<p:sld xmlns:r="http://schemas.openxmlformats.org/officeDocument/2006/relationships" xmlns:c="http://schemas.openxmlformats.org/drawingml/2006/chart" xmlns:a="http://schemas.openxmlformats.org/drawingml/2006/main" xmlns:dgm="http://schemas.openxmlformats.org/drawingml/2006/diagram" xmlns:dsp="http://schemas.microsoft.com/office/drawing/2008/diagram" xmlns:p="http://schemas.openxmlformats.org/presentationml/2006/main">
   <p:cSld>
     <p:spTree>
       <p:nvGrpSpPr>
@@ -4993,18 +4965,12 @@
       </p:grpSpPr>
       <p:sp>
         <p:nvSpPr>
-          <p:cNvPr id="2" name="제목 1">
-            <a:extLst>
-              <a:ext uri="{FF2B5EF4-FFF2-40B4-BE49-F238E27FC236}">
-                <a16:creationId xmlns:a16="http://schemas.microsoft.com/office/drawing/2014/main" id="{587C93D0-5CE3-46C4-19F9-DE2E63C037D0}"/>
-              </a:ext>
-            </a:extLst>
-          </p:cNvPr>
-          <p:cNvSpPr>
-            <a:spLocks noGrp="1"/>
-          </p:cNvSpPr>
-          <p:nvPr>
-            <p:ph type="title"/>
+          <p:cNvPr id="2" name="제목 1"/>
+          <p:cNvSpPr>
+            <a:spLocks noGrp="1"/>
+          </p:cNvSpPr>
+          <p:nvPr>
+            <p:ph type="title" idx="0"/>
           </p:nvPr>
         </p:nvSpPr>
         <p:spPr/>
@@ -5012,23 +4978,20 @@
           <a:bodyPr/>
           <a:lstStyle/>
           <a:p>
-            <a:pPr algn="ctr"/>
-            <a:r>
-              <a:rPr lang="ko-KR" altLang="en-US" dirty="0"/>
+            <a:pPr algn="ctr">
+              <a:defRPr/>
+            </a:pPr>
+            <a:r>
+              <a:rPr lang="ko-KR" altLang="en-US"/>
               <a:t>조합 논리 </a:t>
             </a:r>
-          </a:p>
-        </p:txBody>
-      </p:sp>
-      <p:sp>
-        <p:nvSpPr>
-          <p:cNvPr id="3" name="내용 개체 틀 2">
-            <a:extLst>
-              <a:ext uri="{FF2B5EF4-FFF2-40B4-BE49-F238E27FC236}">
-                <a16:creationId xmlns:a16="http://schemas.microsoft.com/office/drawing/2014/main" id="{F691D613-7013-49C7-066B-3338E9FE5444}"/>
-              </a:ext>
-            </a:extLst>
-          </p:cNvPr>
+            <a:endParaRPr lang="ko-KR" altLang="en-US"/>
+          </a:p>
+        </p:txBody>
+      </p:sp>
+      <p:sp>
+        <p:nvSpPr>
+          <p:cNvPr id="3" name="내용 개체 틀 2"/>
           <p:cNvSpPr>
             <a:spLocks noGrp="1"/>
           </p:cNvSpPr>
@@ -5041,134 +5004,98 @@
           <a:bodyPr/>
           <a:lstStyle/>
           <a:p>
-            <a:r>
-              <a:rPr lang="ko-KR" altLang="en-US" dirty="0"/>
+            <a:pPr lvl="0">
+              <a:defRPr/>
+            </a:pPr>
+            <a:r>
+              <a:rPr lang="ko-KR" altLang="en-US"/>
               <a:t>종류 </a:t>
             </a:r>
             <a:r>
-              <a:rPr lang="en-US" altLang="ko-KR" dirty="0"/>
+              <a:rPr lang="en-US" altLang="ko-KR"/>
               <a:t>: </a:t>
             </a:r>
             <a:r>
-              <a:rPr lang="ko-KR" altLang="ko-KR" dirty="0" err="1"/>
+              <a:rPr lang="ko-KR" altLang="ko-KR"/>
               <a:t>Adder</a:t>
             </a:r>
             <a:r>
-              <a:rPr lang="en-US" altLang="ko-KR" dirty="0"/>
+              <a:rPr lang="en-US" altLang="ko-KR"/>
               <a:t>(</a:t>
             </a:r>
             <a:r>
-              <a:rPr lang="ko-KR" altLang="en-US" dirty="0"/>
+              <a:rPr lang="ko-KR" altLang="en-US"/>
               <a:t>가산기</a:t>
             </a:r>
             <a:r>
-              <a:rPr lang="en-US" altLang="ko-KR" dirty="0"/>
+              <a:rPr lang="en-US" altLang="ko-KR"/>
               <a:t>)</a:t>
             </a:r>
             <a:r>
-              <a:rPr lang="ko-KR" altLang="ko-KR" dirty="0"/>
-              <a:t>, </a:t>
-            </a:r>
-            <a:r>
-              <a:rPr lang="ko-KR" altLang="ko-KR" dirty="0" err="1"/>
-              <a:t>Subtractor</a:t>
-            </a:r>
-            <a:r>
-              <a:rPr lang="en-US" altLang="ko-KR" dirty="0"/>
+              <a:rPr lang="ko-KR" altLang="ko-KR"/>
+              <a:t>, Subtractor</a:t>
+            </a:r>
+            <a:r>
+              <a:rPr lang="en-US" altLang="ko-KR"/>
               <a:t>(</a:t>
             </a:r>
             <a:r>
-              <a:rPr lang="ko-KR" altLang="en-US" dirty="0" err="1"/>
+              <a:rPr lang="ko-KR" altLang="en-US"/>
               <a:t>감산기</a:t>
             </a:r>
             <a:r>
-              <a:rPr lang="en-US" altLang="ko-KR" dirty="0"/>
+              <a:rPr lang="en-US" altLang="ko-KR"/>
               <a:t>)</a:t>
             </a:r>
             <a:r>
-              <a:rPr lang="ko-KR" altLang="ko-KR" dirty="0"/>
-              <a:t>, </a:t>
-            </a:r>
-            <a:r>
-              <a:rPr lang="ko-KR" altLang="ko-KR" dirty="0" err="1"/>
-              <a:t>Comparator</a:t>
-            </a:r>
-            <a:r>
-              <a:rPr lang="en-US" altLang="ko-KR" dirty="0"/>
+              <a:rPr lang="ko-KR" altLang="ko-KR"/>
+              <a:t>, Comparator</a:t>
+            </a:r>
+            <a:r>
+              <a:rPr lang="en-US" altLang="ko-KR"/>
               <a:t>(</a:t>
             </a:r>
             <a:r>
-              <a:rPr lang="ko-KR" altLang="en-US" dirty="0"/>
+              <a:rPr lang="ko-KR" altLang="en-US"/>
               <a:t>비교기</a:t>
             </a:r>
             <a:r>
-              <a:rPr lang="en-US" altLang="ko-KR" dirty="0"/>
+              <a:rPr lang="en-US" altLang="ko-KR"/>
               <a:t>)</a:t>
             </a:r>
             <a:r>
-              <a:rPr lang="ko-KR" altLang="ko-KR" dirty="0"/>
-              <a:t>, </a:t>
-            </a:r>
-            <a:r>
-              <a:rPr lang="ko-KR" altLang="ko-KR" dirty="0" err="1"/>
-              <a:t>Multiplexer</a:t>
-            </a:r>
-            <a:r>
-              <a:rPr lang="ko-KR" altLang="ko-KR" dirty="0"/>
-              <a:t>, </a:t>
-            </a:r>
-            <a:r>
-              <a:rPr lang="ko-KR" altLang="ko-KR" dirty="0" err="1"/>
-              <a:t>Decoder</a:t>
-            </a:r>
-            <a:r>
-              <a:rPr lang="ko-KR" altLang="ko-KR" dirty="0"/>
-              <a:t>, </a:t>
-            </a:r>
-            <a:r>
-              <a:rPr lang="ko-KR" altLang="ko-KR" dirty="0" err="1"/>
-              <a:t>Encoder</a:t>
-            </a:r>
-            <a:r>
-              <a:rPr lang="en-US" altLang="ko-KR" dirty="0"/>
+              <a:rPr lang="ko-KR" altLang="ko-KR"/>
+              <a:t>, Multiplexer, Decoder, Encoder</a:t>
+            </a:r>
+            <a:r>
+              <a:rPr lang="en-US" altLang="ko-KR"/>
               <a:t> </a:t>
             </a:r>
             <a:r>
-              <a:rPr lang="ko-KR" altLang="en-US" dirty="0"/>
+              <a:rPr lang="ko-KR" altLang="en-US"/>
               <a:t>등등</a:t>
             </a:r>
+            <a:endParaRPr lang="ko-KR" altLang="en-US"/>
           </a:p>
         </p:txBody>
       </p:sp>
       <p:pic>
         <p:nvPicPr>
-          <p:cNvPr id="5" name="그림 4">
-            <a:extLst>
-              <a:ext uri="{FF2B5EF4-FFF2-40B4-BE49-F238E27FC236}">
-                <a16:creationId xmlns:a16="http://schemas.microsoft.com/office/drawing/2014/main" id="{65796D2D-97E2-83E2-E73B-E21C7DA22481}"/>
-              </a:ext>
-            </a:extLst>
-          </p:cNvPr>
+          <p:cNvPr id="5" name="그림 4"/>
           <p:cNvPicPr>
             <a:picLocks noChangeAspect="1"/>
           </p:cNvPicPr>
           <p:nvPr/>
         </p:nvPicPr>
-        <p:blipFill>
-          <a:blip r:embed="rId2">
-            <a:extLst>
-              <a:ext uri="{28A0092B-C50C-407E-A947-70E740481C1C}">
-                <a14:useLocalDpi xmlns:a14="http://schemas.microsoft.com/office/drawing/2010/main" val="0"/>
-              </a:ext>
-            </a:extLst>
-          </a:blip>
+        <p:blipFill rotWithShape="1">
+          <a:blip r:embed="rId2"/>
           <a:stretch>
             <a:fillRect/>
           </a:stretch>
         </p:blipFill>
         <p:spPr>
           <a:xfrm>
-            <a:off x="1642643" y="2827354"/>
+            <a:off x="1655515" y="2833789"/>
             <a:ext cx="2525100" cy="3010320"/>
           </a:xfrm>
           <a:prstGeom prst="rect">
@@ -5178,19 +5105,13 @@
       </p:pic>
       <p:pic>
         <p:nvPicPr>
-          <p:cNvPr id="7" name="그림 6">
-            <a:extLst>
-              <a:ext uri="{FF2B5EF4-FFF2-40B4-BE49-F238E27FC236}">
-                <a16:creationId xmlns:a16="http://schemas.microsoft.com/office/drawing/2014/main" id="{6E1BA8DF-2577-3F41-F31B-800ACEB1E23C}"/>
-              </a:ext>
-            </a:extLst>
-          </p:cNvPr>
+          <p:cNvPr id="7" name="그림 6"/>
           <p:cNvPicPr>
             <a:picLocks noChangeAspect="1"/>
           </p:cNvPicPr>
           <p:nvPr/>
         </p:nvPicPr>
-        <p:blipFill>
+        <p:blipFill rotWithShape="1">
           <a:blip r:embed="rId3"/>
           <a:stretch>
             <a:fillRect/>
@@ -5208,19 +5129,13 @@
       </p:pic>
       <p:pic>
         <p:nvPicPr>
-          <p:cNvPr id="9" name="그림 8">
-            <a:extLst>
-              <a:ext uri="{FF2B5EF4-FFF2-40B4-BE49-F238E27FC236}">
-                <a16:creationId xmlns:a16="http://schemas.microsoft.com/office/drawing/2014/main" id="{309549F0-762A-C868-6144-8C49A3CC6194}"/>
-              </a:ext>
-            </a:extLst>
-          </p:cNvPr>
+          <p:cNvPr id="9" name="그림 8"/>
           <p:cNvPicPr>
             <a:picLocks noChangeAspect="1"/>
           </p:cNvPicPr>
           <p:nvPr/>
         </p:nvPicPr>
-        <p:blipFill>
+        <p:blipFill rotWithShape="1">
           <a:blip r:embed="rId4"/>
           <a:stretch>
             <a:fillRect/>
@@ -5238,19 +5153,13 @@
       </p:pic>
       <p:pic>
         <p:nvPicPr>
-          <p:cNvPr id="11" name="그림 10">
-            <a:extLst>
-              <a:ext uri="{FF2B5EF4-FFF2-40B4-BE49-F238E27FC236}">
-                <a16:creationId xmlns:a16="http://schemas.microsoft.com/office/drawing/2014/main" id="{3EE7A9E3-425E-9CBB-B2C3-A13F7D429140}"/>
-              </a:ext>
-            </a:extLst>
-          </p:cNvPr>
+          <p:cNvPr id="11" name="그림 10"/>
           <p:cNvPicPr>
             <a:picLocks noChangeAspect="1"/>
           </p:cNvPicPr>
           <p:nvPr/>
         </p:nvPicPr>
-        <p:blipFill>
+        <p:blipFill rotWithShape="1">
           <a:blip r:embed="rId5"/>
           <a:stretch>
             <a:fillRect/>
@@ -5267,15 +5176,18 @@
         </p:spPr>
       </p:pic>
     </p:spTree>
-    <p:extLst>
-      <p:ext uri="{BB962C8B-B14F-4D97-AF65-F5344CB8AC3E}">
-        <p14:creationId xmlns:p14="http://schemas.microsoft.com/office/powerpoint/2010/main" val="1800701281"/>
-      </p:ext>
-    </p:extLst>
   </p:cSld>
   <p:clrMapOvr>
     <a:masterClrMapping/>
   </p:clrMapOvr>
+  <mc:AlternateContent xmlns:mc="http://schemas.openxmlformats.org/markup-compatibility/2006">
+    <mc:Choice xmlns:p14="http://schemas.microsoft.com/office/powerpoint/2010/main" Requires="p14">
+      <p:transition xmlns:mc="http://schemas.openxmlformats.org/markup-compatibility/2006" xmlns:p14="http://schemas.microsoft.com/office/powerpoint/2010/main" mc:Ignorable="p14" p14:dur="500"/>
+    </mc:Choice>
+    <mc:Fallback>
+      <p:transition/>
+    </mc:Fallback>
+  </mc:AlternateContent>
 </p:sld>
 </file>
 
